--- a/slides/Toan10/Slide_TOAN10_BaiTapCuoiChuong1_T9.pptx
+++ b/slides/Toan10/Slide_TOAN10_BaiTapCuoiChuong1_T9.pptx
@@ -9414,7 +9414,7 @@
                 </a:r>
                 <a:r>
                   <a:rPr lang="vi-VN"/>
-                  <a:t>\forall x\in\mathbb{R},\ x^2&gt;1\Rightarrow x&gt;-1</a:t>
+                  <a:t>\forall x\in\mathbb{R},\ x^2&gt;1\Rightarrow x&gt;−1</a:t>
                 </a:r>
               </a:p>
               <a:p>
@@ -9464,7 +9464,7 @@
                 </a:r>
                 <a:r>
                   <a:rPr lang="vi-VN"/>
-                  <a:t>\forall x\in\mathbb{R},\ x&gt;-1\Rightarrow x^2&gt;1</a:t>
+                  <a:t>\forall x\in\mathbb{R},\ x&gt;−1\Rightarrow x^2&gt;1</a:t>
                 </a:r>
               </a:p>
               <a:p>

--- a/slides/Toan10/Slide_TOAN10_BaiTapCuoiChuong1_T9.pptx
+++ b/slides/Toan10/Slide_TOAN10_BaiTapCuoiChuong1_T9.pptx
@@ -4377,7 +4377,7 @@
         <p:spPr>
           <a:xfrm>
             <a:off x="731520" y="274320"/>
-            <a:ext cx="10972800" cy="868680"/>
+            <a:ext cx="9848088" cy="868680"/>
           </a:xfrm>
           <a:prstGeom prst="rect">
             <a:avLst/>
@@ -4563,6 +4563,59 @@
                 <a:latin typeface="Calibri"/>
               </a:rPr>
               <a:t>Tìm A ∪ B, A ∩ B, A \ B</a:t>
+            </a:r>
+          </a:p>
+        </p:txBody>
+      </p:sp>
+      <p:sp>
+        <p:nvSpPr>
+          <p:cNvPr id="7" name="Rounded Rectangle 6"/>
+          <p:cNvSpPr/>
+          <p:nvPr/>
+        </p:nvSpPr>
+        <p:spPr>
+          <a:xfrm>
+            <a:off x="10701223" y="457200"/>
+            <a:ext cx="941832" cy="457200"/>
+          </a:xfrm>
+          <a:prstGeom prst="roundRect">
+            <a:avLst/>
+          </a:prstGeom>
+          <a:solidFill>
+            <a:srgbClr val="1E40AF"/>
+          </a:solidFill>
+          <a:ln>
+            <a:noFill/>
+          </a:ln>
+          <a:effectLst/>
+        </p:spPr>
+        <p:style>
+          <a:lnRef idx="1">
+            <a:schemeClr val="accent1"/>
+          </a:lnRef>
+          <a:fillRef idx="3">
+            <a:schemeClr val="accent1"/>
+          </a:fillRef>
+          <a:effectRef idx="2">
+            <a:schemeClr val="accent1"/>
+          </a:effectRef>
+          <a:fontRef idx="minor">
+            <a:schemeClr val="lt1"/>
+          </a:fontRef>
+        </p:style>
+        <p:txBody>
+          <a:bodyPr rtlCol="0" anchor="ctr" tIns="0" bIns="0"/>
+          <a:lstStyle/>
+          <a:p>
+            <a:pPr algn="ctr"/>
+            <a:r>
+              <a:rPr sz="1400" b="1">
+                <a:solidFill>
+                  <a:srgbClr val="FFFFFF"/>
+                </a:solidFill>
+                <a:latin typeface="Arial"/>
+              </a:rPr>
+              <a:t>ĐỀ BÀI</a:t>
             </a:r>
           </a:p>
         </p:txBody>
@@ -4646,7 +4699,7 @@
         <p:spPr>
           <a:xfrm>
             <a:off x="731520" y="274320"/>
-            <a:ext cx="10972800" cy="868680"/>
+            <a:ext cx="9610344" cy="868680"/>
           </a:xfrm>
           <a:prstGeom prst="rect">
             <a:avLst/>
@@ -4666,7 +4719,7 @@
                 </a:solidFill>
                 <a:latin typeface="Arial"/>
               </a:rPr>
-              <a:t>TỰ LUẬN 1.25 – 1.26</a:t>
+              <a:t>TỰ LUẬN 1.24</a:t>
             </a:r>
           </a:p>
         </p:txBody>
@@ -4745,7 +4798,7 @@
                 </a:solidFill>
                 <a:latin typeface="Calibri"/>
               </a:rPr>
-              <a:t>Toán 10 · Bài tập cuối chương I          14</a:t>
+              <a:t>Toán 10 · Bài tập cuối chương I          13</a:t>
             </a:r>
           </a:p>
         </p:txBody>
@@ -4759,7 +4812,7 @@
         <p:spPr>
           <a:xfrm>
             <a:off x="731520" y="1508760"/>
-            <a:ext cx="10789920" cy="2834640"/>
+            <a:ext cx="10789920" cy="2267712"/>
           </a:xfrm>
           <a:prstGeom prst="rect">
             <a:avLst/>
@@ -4771,6 +4824,22 @@
             <a:spAutoFit/>
           </a:bodyPr>
           <a:lstStyle/>
+          <a:p>
+            <a:pPr algn="l">
+              <a:spcAft>
+                <a:spcPts val="1000"/>
+              </a:spcAft>
+            </a:pPr>
+            <a:r>
+              <a:rPr sz="2400" b="1">
+                <a:solidFill>
+                  <a:srgbClr val="1E40AF"/>
+                </a:solidFill>
+                <a:latin typeface="Calibri"/>
+              </a:rPr>
+              <a:t>A = {x ∈ ℕ | x &lt; 7};  B = {1; 2; 3; 6; 7; 8}</a:t>
+            </a:r>
+          </a:p>
           <a:p>
             <a:pPr algn="l" marL="365760" indent="-365760">
               <a:spcAft>
@@ -4789,7 +4858,7 @@
                 </a:solidFill>
                 <a:latin typeface="Calibri"/>
               </a:rPr>
-              <a:t>1.25. A = [−2; 3],  B = (1; +∞)</a:t>
+              <a:t>A ∪ B = {0; 1; 2; 3; 4; 5; 6; 7; 8}</a:t>
             </a:r>
           </a:p>
           <a:p>
@@ -4810,7 +4879,7 @@
                 </a:solidFill>
                 <a:latin typeface="Calibri"/>
               </a:rPr>
-              <a:t>Tìm A ∩ B, B \ A, CℝB</a:t>
+              <a:t>A ∩ B = {1; 2; 3; 6}</a:t>
             </a:r>
           </a:p>
           <a:p>
@@ -4831,44 +4900,60 @@
                 </a:solidFill>
                 <a:latin typeface="Calibri"/>
               </a:rPr>
-              <a:t>1.26. Tìm (−∞; 1) ∩ (0; +∞)</a:t>
-            </a:r>
-          </a:p>
-          <a:p>
-            <a:pPr algn="l" marL="365760" indent="-365760">
-              <a:spcAft>
-                <a:spcPts val="1000"/>
-              </a:spcAft>
-              <a:buClr>
-                <a:srgbClr val="1E40AF"/>
-              </a:buClr>
-              <a:buFont typeface="Arial"/>
-              <a:buChar char="•"/>
-            </a:pPr>
-            <a:r>
-              <a:rPr sz="2400">
-                <a:solidFill>
-                  <a:srgbClr val="1E293B"/>
-                </a:solidFill>
-                <a:latin typeface="Calibri"/>
-              </a:rPr>
-              <a:t>(4; 7] ∪ (−1; 5);  (4; 7] \ (−3; 5]</a:t>
-            </a:r>
-          </a:p>
-          <a:p>
-            <a:pPr algn="l">
-              <a:spcAft>
-                <a:spcPts val="1000"/>
-              </a:spcAft>
-            </a:pPr>
-            <a:r>
-              <a:rPr sz="2400" b="1">
-                <a:solidFill>
-                  <a:srgbClr val="1E40AF"/>
-                </a:solidFill>
-                <a:latin typeface="Calibri"/>
-              </a:rPr>
-              <a:t>Gợi mở: Biểu diễn trên trục số</a:t>
+              <a:t>A \ B = {0; 4; 5}</a:t>
+            </a:r>
+          </a:p>
+        </p:txBody>
+      </p:sp>
+      <p:sp>
+        <p:nvSpPr>
+          <p:cNvPr id="7" name="Rounded Rectangle 6"/>
+          <p:cNvSpPr/>
+          <p:nvPr/>
+        </p:nvSpPr>
+        <p:spPr>
+          <a:xfrm>
+            <a:off x="10463479" y="457200"/>
+            <a:ext cx="1179576" cy="457200"/>
+          </a:xfrm>
+          <a:prstGeom prst="roundRect">
+            <a:avLst/>
+          </a:prstGeom>
+          <a:solidFill>
+            <a:srgbClr val="166534"/>
+          </a:solidFill>
+          <a:ln>
+            <a:noFill/>
+          </a:ln>
+          <a:effectLst/>
+        </p:spPr>
+        <p:style>
+          <a:lnRef idx="1">
+            <a:schemeClr val="accent1"/>
+          </a:lnRef>
+          <a:fillRef idx="3">
+            <a:schemeClr val="accent1"/>
+          </a:fillRef>
+          <a:effectRef idx="2">
+            <a:schemeClr val="accent1"/>
+          </a:effectRef>
+          <a:fontRef idx="minor">
+            <a:schemeClr val="lt1"/>
+          </a:fontRef>
+        </p:style>
+        <p:txBody>
+          <a:bodyPr rtlCol="0" anchor="ctr" tIns="0" bIns="0"/>
+          <a:lstStyle/>
+          <a:p>
+            <a:pPr algn="ctr"/>
+            <a:r>
+              <a:rPr sz="1400" b="1">
+                <a:solidFill>
+                  <a:srgbClr val="FFFFFF"/>
+                </a:solidFill>
+                <a:latin typeface="Arial"/>
+              </a:rPr>
+              <a:t>LỜI GIẢI</a:t>
             </a:r>
           </a:p>
         </p:txBody>
@@ -4952,7 +5037,7 @@
         <p:spPr>
           <a:xfrm>
             <a:off x="731520" y="274320"/>
-            <a:ext cx="10972800" cy="868680"/>
+            <a:ext cx="9848088" cy="868680"/>
           </a:xfrm>
           <a:prstGeom prst="rect">
             <a:avLst/>
@@ -4972,7 +5057,7 @@
                 </a:solidFill>
                 <a:latin typeface="Arial"/>
               </a:rPr>
-              <a:t>TRẠM KIỂM CHỨNG AI</a:t>
+              <a:t>TỰ LUẬN 1.25 – 1.26</a:t>
             </a:r>
           </a:p>
         </p:txBody>
@@ -5051,7 +5136,7 @@
                 </a:solidFill>
                 <a:latin typeface="Calibri"/>
               </a:rPr>
-              <a:t>Toán 10 · Bài tập cuối chương I          16</a:t>
+              <a:t>Toán 10 · Bài tập cuối chương I          14</a:t>
             </a:r>
           </a:p>
         </p:txBody>
@@ -5065,7 +5150,7 @@
         <p:spPr>
           <a:xfrm>
             <a:off x="731520" y="1508760"/>
-            <a:ext cx="10789920" cy="1700784"/>
+            <a:ext cx="10789920" cy="2834640"/>
           </a:xfrm>
           <a:prstGeom prst="rect">
             <a:avLst/>
@@ -5095,7 +5180,7 @@
                 </a:solidFill>
                 <a:latin typeface="Calibri"/>
               </a:rPr>
-              <a:t>AI: (4; 7] \ (−3; 5] = [5; 7]</a:t>
+              <a:t>1.25. A = [−2; 3],  B = (1; +∞)</a:t>
             </a:r>
           </a:p>
           <a:p>
@@ -5116,7 +5201,49 @@
                 </a:solidFill>
                 <a:latin typeface="Calibri"/>
               </a:rPr>
-              <a:t>AI: “∀x ∈ ℝ, x² &gt; 1 ⇒ x &gt; 1” đúng</a:t>
+              <a:t>Tìm A ∩ B, B \ A, CℝB</a:t>
+            </a:r>
+          </a:p>
+          <a:p>
+            <a:pPr algn="l" marL="365760" indent="-365760">
+              <a:spcAft>
+                <a:spcPts val="1000"/>
+              </a:spcAft>
+              <a:buClr>
+                <a:srgbClr val="1E40AF"/>
+              </a:buClr>
+              <a:buFont typeface="Arial"/>
+              <a:buChar char="•"/>
+            </a:pPr>
+            <a:r>
+              <a:rPr sz="2400">
+                <a:solidFill>
+                  <a:srgbClr val="1E293B"/>
+                </a:solidFill>
+                <a:latin typeface="Calibri"/>
+              </a:rPr>
+              <a:t>1.26. Tìm (−∞; 1) ∩ (0; +∞)</a:t>
+            </a:r>
+          </a:p>
+          <a:p>
+            <a:pPr algn="l" marL="365760" indent="-365760">
+              <a:spcAft>
+                <a:spcPts val="1000"/>
+              </a:spcAft>
+              <a:buClr>
+                <a:srgbClr val="1E40AF"/>
+              </a:buClr>
+              <a:buFont typeface="Arial"/>
+              <a:buChar char="•"/>
+            </a:pPr>
+            <a:r>
+              <a:rPr sz="2400">
+                <a:solidFill>
+                  <a:srgbClr val="1E293B"/>
+                </a:solidFill>
+                <a:latin typeface="Calibri"/>
+              </a:rPr>
+              <a:t>(4; 7] ∪ (−1; 5);  (4; 7] \ (−3; 5]</a:t>
             </a:r>
           </a:p>
           <a:p>
@@ -5132,7 +5259,60 @@
                 </a:solidFill>
                 <a:latin typeface="Calibri"/>
               </a:rPr>
-              <a:t>Gợi mở: Tìm bước sai, giải thích, sửa lại</a:t>
+              <a:t>Gợi mở: Biểu diễn trên trục số</a:t>
+            </a:r>
+          </a:p>
+        </p:txBody>
+      </p:sp>
+      <p:sp>
+        <p:nvSpPr>
+          <p:cNvPr id="7" name="Rounded Rectangle 6"/>
+          <p:cNvSpPr/>
+          <p:nvPr/>
+        </p:nvSpPr>
+        <p:spPr>
+          <a:xfrm>
+            <a:off x="10701223" y="457200"/>
+            <a:ext cx="941832" cy="457200"/>
+          </a:xfrm>
+          <a:prstGeom prst="roundRect">
+            <a:avLst/>
+          </a:prstGeom>
+          <a:solidFill>
+            <a:srgbClr val="1E40AF"/>
+          </a:solidFill>
+          <a:ln>
+            <a:noFill/>
+          </a:ln>
+          <a:effectLst/>
+        </p:spPr>
+        <p:style>
+          <a:lnRef idx="1">
+            <a:schemeClr val="accent1"/>
+          </a:lnRef>
+          <a:fillRef idx="3">
+            <a:schemeClr val="accent1"/>
+          </a:fillRef>
+          <a:effectRef idx="2">
+            <a:schemeClr val="accent1"/>
+          </a:effectRef>
+          <a:fontRef idx="minor">
+            <a:schemeClr val="lt1"/>
+          </a:fontRef>
+        </p:style>
+        <p:txBody>
+          <a:bodyPr rtlCol="0" anchor="ctr" tIns="0" bIns="0"/>
+          <a:lstStyle/>
+          <a:p>
+            <a:pPr algn="ctr"/>
+            <a:r>
+              <a:rPr sz="1400" b="1">
+                <a:solidFill>
+                  <a:srgbClr val="FFFFFF"/>
+                </a:solidFill>
+                <a:latin typeface="Arial"/>
+              </a:rPr>
+              <a:t>ĐỀ BÀI</a:t>
             </a:r>
           </a:p>
         </p:txBody>
@@ -5216,7 +5396,7 @@
         <p:spPr>
           <a:xfrm>
             <a:off x="731520" y="274320"/>
-            <a:ext cx="10972800" cy="868680"/>
+            <a:ext cx="9610344" cy="868680"/>
           </a:xfrm>
           <a:prstGeom prst="rect">
             <a:avLst/>
@@ -5236,7 +5416,7 @@
                 </a:solidFill>
                 <a:latin typeface="Arial"/>
               </a:rPr>
-              <a:t>VẬN DỤNG: BÀI TẬP 1.27</a:t>
+              <a:t>TỰ LUẬN 1.25 – 1.26</a:t>
             </a:r>
           </a:p>
         </p:txBody>
@@ -5315,45 +5495,21 @@
                 </a:solidFill>
                 <a:latin typeface="Calibri"/>
               </a:rPr>
-              <a:t>Toán 10 · Bài tập cuối chương I          18</a:t>
-            </a:r>
-          </a:p>
-        </p:txBody>
-      </p:sp>
-      <p:pic>
-        <p:nvPicPr>
-          <p:cNvPr id="9" name="Picture 8" descr="rId9.png"/>
-          <p:cNvPicPr>
-            <a:picLocks noChangeAspect="1"/>
-          </p:cNvPicPr>
-          <p:nvPr/>
-        </p:nvPicPr>
-        <p:blipFill>
-          <a:blip r:embed="rId2"/>
-          <a:stretch>
-            <a:fillRect/>
-          </a:stretch>
-        </p:blipFill>
-        <p:spPr>
-          <a:xfrm>
-            <a:off x="7406640" y="2337511"/>
-            <a:ext cx="4389120" cy="2960217"/>
-          </a:xfrm>
-          <a:prstGeom prst="rect">
-            <a:avLst/>
-          </a:prstGeom>
-        </p:spPr>
-      </p:pic>
-      <p:sp>
-        <p:nvSpPr>
-          <p:cNvPr id="10" name="TextBox 9"/>
+              <a:t>Toán 10 · Bài tập cuối chương I          15</a:t>
+            </a:r>
+          </a:p>
+        </p:txBody>
+      </p:sp>
+      <p:sp>
+        <p:nvSpPr>
+          <p:cNvPr id="6" name="TextBox 5"/>
           <p:cNvSpPr txBox="1"/>
           <p:nvPr/>
         </p:nvSpPr>
         <p:spPr>
           <a:xfrm>
             <a:off x="731520" y="1508760"/>
-            <a:ext cx="6400800" cy="2267712"/>
+            <a:ext cx="10789920" cy="3118103"/>
           </a:xfrm>
           <a:prstGeom prst="rect">
             <a:avLst/>
@@ -5377,13 +5533,13 @@
               <a:buChar char="•"/>
             </a:pPr>
             <a:r>
-              <a:rPr sz="2400">
+              <a:rPr sz="2200">
                 <a:solidFill>
                   <a:srgbClr val="1E293B"/>
                 </a:solidFill>
                 <a:latin typeface="Calibri"/>
               </a:rPr>
-              <a:t>1 410 khách, ai cũng thăm ≥ 1 nơi</a:t>
+              <a:t>1.25. A = [−2; 3],  B = (1; +∞)</a:t>
             </a:r>
           </a:p>
           <a:p>
@@ -5398,13 +5554,13 @@
               <a:buChar char="•"/>
             </a:pPr>
             <a:r>
-              <a:rPr sz="2400">
+              <a:rPr sz="2200">
                 <a:solidFill>
                   <a:srgbClr val="1E293B"/>
                 </a:solidFill>
                 <a:latin typeface="Calibri"/>
               </a:rPr>
-              <a:t>789 khách thăm động Thiên Cung</a:t>
+              <a:t>A ∩ B = (1; 3];   B \ A = (3; +∞)</a:t>
             </a:r>
           </a:p>
           <a:p>
@@ -5419,13 +5575,31 @@
               <a:buChar char="•"/>
             </a:pPr>
             <a:r>
-              <a:rPr sz="2400">
+              <a:rPr sz="2200">
                 <a:solidFill>
                   <a:srgbClr val="1E293B"/>
                 </a:solidFill>
                 <a:latin typeface="Calibri"/>
               </a:rPr>
-              <a:t>690 khách thăm đảo Titop</a:t>
+              <a:t>C</a:t>
+            </a:r>
+            <a:r>
+              <a:rPr sz="2200" baseline="-25000">
+                <a:solidFill>
+                  <a:srgbClr val="1E293B"/>
+                </a:solidFill>
+                <a:latin typeface="Calibri"/>
+              </a:rPr>
+              <a:t>ℝ</a:t>
+            </a:r>
+            <a:r>
+              <a:rPr sz="2200">
+                <a:solidFill>
+                  <a:srgbClr val="1E293B"/>
+                </a:solidFill>
+                <a:latin typeface="Calibri"/>
+              </a:rPr>
+              <a:t>B = (−∞; 1]</a:t>
             </a:r>
           </a:p>
           <a:p>
@@ -5440,13 +5614,108 @@
               <a:buChar char="•"/>
             </a:pPr>
             <a:r>
-              <a:rPr sz="2400">
+              <a:rPr sz="2200">
                 <a:solidFill>
                   <a:srgbClr val="1E293B"/>
                 </a:solidFill>
                 <a:latin typeface="Calibri"/>
               </a:rPr>
-              <a:t>Bao nhiêu khách thăm cả hai nơi?</a:t>
+              <a:t>1.26. (−∞; 1) ∩ (0; +∞) = (0; 1)</a:t>
+            </a:r>
+          </a:p>
+          <a:p>
+            <a:pPr algn="l" marL="365760" indent="-365760">
+              <a:spcAft>
+                <a:spcPts val="1000"/>
+              </a:spcAft>
+              <a:buClr>
+                <a:srgbClr val="1E40AF"/>
+              </a:buClr>
+              <a:buFont typeface="Arial"/>
+              <a:buChar char="•"/>
+            </a:pPr>
+            <a:r>
+              <a:rPr sz="2200">
+                <a:solidFill>
+                  <a:srgbClr val="1E293B"/>
+                </a:solidFill>
+                <a:latin typeface="Calibri"/>
+              </a:rPr>
+              <a:t>(4; 7] ∪ (−1; 5) = (−1; 7]</a:t>
+            </a:r>
+          </a:p>
+          <a:p>
+            <a:pPr algn="l" marL="365760" indent="-365760">
+              <a:spcAft>
+                <a:spcPts val="1000"/>
+              </a:spcAft>
+              <a:buClr>
+                <a:srgbClr val="1E40AF"/>
+              </a:buClr>
+              <a:buFont typeface="Arial"/>
+              <a:buChar char="•"/>
+            </a:pPr>
+            <a:r>
+              <a:rPr sz="2200">
+                <a:solidFill>
+                  <a:srgbClr val="1E293B"/>
+                </a:solidFill>
+                <a:latin typeface="Calibri"/>
+              </a:rPr>
+              <a:t>(4; 7] \ (−3; 5] = (5; 7]</a:t>
+            </a:r>
+          </a:p>
+        </p:txBody>
+      </p:sp>
+      <p:sp>
+        <p:nvSpPr>
+          <p:cNvPr id="7" name="Rounded Rectangle 6"/>
+          <p:cNvSpPr/>
+          <p:nvPr/>
+        </p:nvSpPr>
+        <p:spPr>
+          <a:xfrm>
+            <a:off x="10463479" y="457200"/>
+            <a:ext cx="1179576" cy="457200"/>
+          </a:xfrm>
+          <a:prstGeom prst="roundRect">
+            <a:avLst/>
+          </a:prstGeom>
+          <a:solidFill>
+            <a:srgbClr val="166534"/>
+          </a:solidFill>
+          <a:ln>
+            <a:noFill/>
+          </a:ln>
+          <a:effectLst/>
+        </p:spPr>
+        <p:style>
+          <a:lnRef idx="1">
+            <a:schemeClr val="accent1"/>
+          </a:lnRef>
+          <a:fillRef idx="3">
+            <a:schemeClr val="accent1"/>
+          </a:fillRef>
+          <a:effectRef idx="2">
+            <a:schemeClr val="accent1"/>
+          </a:effectRef>
+          <a:fontRef idx="minor">
+            <a:schemeClr val="lt1"/>
+          </a:fontRef>
+        </p:style>
+        <p:txBody>
+          <a:bodyPr rtlCol="0" anchor="ctr" tIns="0" bIns="0"/>
+          <a:lstStyle/>
+          <a:p>
+            <a:pPr algn="ctr"/>
+            <a:r>
+              <a:rPr sz="1400" b="1">
+                <a:solidFill>
+                  <a:srgbClr val="FFFFFF"/>
+                </a:solidFill>
+                <a:latin typeface="Arial"/>
+              </a:rPr>
+              <a:t>LỜI GIẢI</a:t>
             </a:r>
           </a:p>
         </p:txBody>
@@ -5530,7 +5799,7 @@
         <p:spPr>
           <a:xfrm>
             <a:off x="731520" y="274320"/>
-            <a:ext cx="10972800" cy="868680"/>
+            <a:ext cx="9848088" cy="868680"/>
           </a:xfrm>
           <a:prstGeom prst="rect">
             <a:avLst/>
@@ -5550,7 +5819,7 @@
                 </a:solidFill>
                 <a:latin typeface="Arial"/>
               </a:rPr>
-              <a:t>NHIỆM VỤ VỀ NHÀ</a:t>
+              <a:t>TRẠM KIỂM CHỨNG AI</a:t>
             </a:r>
           </a:p>
         </p:txBody>
@@ -5629,7 +5898,7 @@
                 </a:solidFill>
                 <a:latin typeface="Calibri"/>
               </a:rPr>
-              <a:t>Toán 10 · Bài tập cuối chương I          20</a:t>
+              <a:t>Toán 10 · Bài tập cuối chương I          16</a:t>
             </a:r>
           </a:p>
         </p:txBody>
@@ -5643,7 +5912,7 @@
         <p:spPr>
           <a:xfrm>
             <a:off x="731520" y="1508760"/>
-            <a:ext cx="10789920" cy="2834640"/>
+            <a:ext cx="10789920" cy="1700784"/>
           </a:xfrm>
           <a:prstGeom prst="rect">
             <a:avLst/>
@@ -5673,7 +5942,7 @@
                 </a:solidFill>
                 <a:latin typeface="Calibri"/>
               </a:rPr>
-              <a:t>Chọn điểm du lịch ở Gia Lai</a:t>
+              <a:t>AI: (4; 7] \ (−3; 5] = [5; 7]</a:t>
             </a:r>
           </a:p>
           <a:p>
@@ -5694,70 +5963,76 @@
                 </a:solidFill>
                 <a:latin typeface="Calibri"/>
               </a:rPr>
-              <a:t>Viết đoạn giới thiệu, ghi nguồn</a:t>
-            </a:r>
-          </a:p>
-          <a:p>
-            <a:pPr algn="l" marL="365760" indent="-365760">
+              <a:t>AI: “∀x ∈ ℝ, x² &gt; 1 ⇒ x &gt; 1” đúng</a:t>
+            </a:r>
+          </a:p>
+          <a:p>
+            <a:pPr algn="l">
               <a:spcAft>
                 <a:spcPts val="1000"/>
               </a:spcAft>
-              <a:buClr>
-                <a:srgbClr val="1E40AF"/>
-              </a:buClr>
-              <a:buFont typeface="Arial"/>
-              <a:buChar char="•"/>
             </a:pPr>
             <a:r>
-              <a:rPr sz="2400">
-                <a:solidFill>
-                  <a:srgbClr val="1E293B"/>
+              <a:rPr sz="2400" b="1">
+                <a:solidFill>
+                  <a:srgbClr val="1E40AF"/>
                 </a:solidFill>
                 <a:latin typeface="Calibri"/>
               </a:rPr>
-              <a:t>Tự đặt bài toán như 1.27</a:t>
-            </a:r>
-          </a:p>
-          <a:p>
-            <a:pPr algn="l" marL="365760" indent="-365760">
-              <a:spcAft>
-                <a:spcPts val="1000"/>
-              </a:spcAft>
-              <a:buClr>
-                <a:srgbClr val="1E40AF"/>
-              </a:buClr>
-              <a:buFont typeface="Arial"/>
-              <a:buChar char="•"/>
-            </a:pPr>
-            <a:r>
-              <a:rPr sz="2400">
-                <a:solidFill>
-                  <a:srgbClr val="1E293B"/>
-                </a:solidFill>
-                <a:latin typeface="Calibri"/>
-              </a:rPr>
-              <a:t>Giải bằng biểu đồ Ven</a:t>
-            </a:r>
-          </a:p>
-          <a:p>
-            <a:pPr algn="l" marL="365760" indent="-365760">
-              <a:spcAft>
-                <a:spcPts val="1000"/>
-              </a:spcAft>
-              <a:buClr>
-                <a:srgbClr val="1E40AF"/>
-              </a:buClr>
-              <a:buFont typeface="Arial"/>
-              <a:buChar char="•"/>
-            </a:pPr>
-            <a:r>
-              <a:rPr sz="2400">
-                <a:solidFill>
-                  <a:srgbClr val="1E293B"/>
-                </a:solidFill>
-                <a:latin typeface="Calibri"/>
-              </a:rPr>
-              <a:t>Ghi Nhật ký sử dụng AI</a:t>
+              <a:t>Gợi mở: Tìm bước sai, giải thích, sửa lại</a:t>
+            </a:r>
+          </a:p>
+        </p:txBody>
+      </p:sp>
+      <p:sp>
+        <p:nvSpPr>
+          <p:cNvPr id="7" name="Rounded Rectangle 6"/>
+          <p:cNvSpPr/>
+          <p:nvPr/>
+        </p:nvSpPr>
+        <p:spPr>
+          <a:xfrm>
+            <a:off x="10701223" y="457200"/>
+            <a:ext cx="941832" cy="457200"/>
+          </a:xfrm>
+          <a:prstGeom prst="roundRect">
+            <a:avLst/>
+          </a:prstGeom>
+          <a:solidFill>
+            <a:srgbClr val="1E40AF"/>
+          </a:solidFill>
+          <a:ln>
+            <a:noFill/>
+          </a:ln>
+          <a:effectLst/>
+        </p:spPr>
+        <p:style>
+          <a:lnRef idx="1">
+            <a:schemeClr val="accent1"/>
+          </a:lnRef>
+          <a:fillRef idx="3">
+            <a:schemeClr val="accent1"/>
+          </a:fillRef>
+          <a:effectRef idx="2">
+            <a:schemeClr val="accent1"/>
+          </a:effectRef>
+          <a:fontRef idx="minor">
+            <a:schemeClr val="lt1"/>
+          </a:fontRef>
+        </p:style>
+        <p:txBody>
+          <a:bodyPr rtlCol="0" anchor="ctr" tIns="0" bIns="0"/>
+          <a:lstStyle/>
+          <a:p>
+            <a:pPr algn="ctr"/>
+            <a:r>
+              <a:rPr sz="1400" b="1">
+                <a:solidFill>
+                  <a:srgbClr val="FFFFFF"/>
+                </a:solidFill>
+                <a:latin typeface="Arial"/>
+              </a:rPr>
+              <a:t>ĐỀ BÀI</a:t>
             </a:r>
           </a:p>
         </p:txBody>
@@ -5841,7 +6116,7 @@
         <p:spPr>
           <a:xfrm>
             <a:off x="731520" y="274320"/>
-            <a:ext cx="10972800" cy="868680"/>
+            <a:ext cx="9610344" cy="868680"/>
           </a:xfrm>
           <a:prstGeom prst="rect">
             <a:avLst/>
@@ -5861,7 +6136,7 @@
                 </a:solidFill>
                 <a:latin typeface="Arial"/>
               </a:rPr>
-              <a:t>BÀI TẬP CỦA BẠN</a:t>
+              <a:t>TRẠM KIỂM CHỨNG AI</a:t>
             </a:r>
           </a:p>
         </p:txBody>
@@ -5940,91 +6215,21 @@
                 </a:solidFill>
                 <a:latin typeface="Calibri"/>
               </a:rPr>
-              <a:t>Toán 10 · Bài tập cuối chương I          21</a:t>
-            </a:r>
-          </a:p>
-        </p:txBody>
-      </p:sp>
-      <p:sp>
-        <p:nvSpPr>
-          <p:cNvPr id="6" name="Rectangle 5"/>
-          <p:cNvSpPr/>
-          <p:nvPr/>
-        </p:nvSpPr>
-        <p:spPr>
-          <a:xfrm>
-            <a:off x="731520" y="1463040"/>
-            <a:ext cx="4572000" cy="4572000"/>
-          </a:xfrm>
-          <a:prstGeom prst="rect">
-            <a:avLst/>
-          </a:prstGeom>
-          <a:solidFill>
-            <a:srgbClr val="F8FAFC"/>
-          </a:solidFill>
-          <a:ln w="19050">
-            <a:solidFill>
-              <a:srgbClr val="E2E8F0"/>
-            </a:solidFill>
-          </a:ln>
-          <a:effectLst/>
-        </p:spPr>
-        <p:style>
-          <a:lnRef idx="1">
-            <a:schemeClr val="accent1"/>
-          </a:lnRef>
-          <a:fillRef idx="3">
-            <a:schemeClr val="accent1"/>
-          </a:fillRef>
-          <a:effectRef idx="2">
-            <a:schemeClr val="accent1"/>
-          </a:effectRef>
-          <a:fontRef idx="minor">
-            <a:schemeClr val="lt1"/>
-          </a:fontRef>
-        </p:style>
-        <p:txBody>
-          <a:bodyPr rtlCol="0" anchor="ctr"/>
-          <a:lstStyle/>
-          <a:p>
-            <a:pPr algn="ctr"/>
-          </a:p>
-        </p:txBody>
-      </p:sp>
-      <p:pic>
-        <p:nvPicPr>
-          <p:cNvPr id="7" name="Picture 6" descr="QR_CungCo_Chuong1_Toan10.png"/>
-          <p:cNvPicPr>
-            <a:picLocks noChangeAspect="1"/>
-          </p:cNvPicPr>
-          <p:nvPr/>
-        </p:nvPicPr>
-        <p:blipFill>
-          <a:blip r:embed="rId2"/>
-          <a:stretch>
-            <a:fillRect/>
-          </a:stretch>
-        </p:blipFill>
-        <p:spPr>
-          <a:xfrm>
-            <a:off x="960120" y="1691640"/>
-            <a:ext cx="4114800" cy="4114800"/>
-          </a:xfrm>
-          <a:prstGeom prst="rect">
-            <a:avLst/>
-          </a:prstGeom>
-        </p:spPr>
-      </p:pic>
-      <p:sp>
-        <p:nvSpPr>
-          <p:cNvPr id="8" name="TextBox 7"/>
+              <a:t>Toán 10 · Bài tập cuối chương I          17</a:t>
+            </a:r>
+          </a:p>
+        </p:txBody>
+      </p:sp>
+      <p:sp>
+        <p:nvSpPr>
+          <p:cNvPr id="6" name="TextBox 5"/>
           <p:cNvSpPr txBox="1"/>
           <p:nvPr/>
         </p:nvSpPr>
         <p:spPr>
           <a:xfrm>
-            <a:off x="5760720" y="1554480"/>
-            <a:ext cx="6035040" cy="3108960"/>
+            <a:off x="731520" y="1508760"/>
+            <a:ext cx="10789920" cy="1700784"/>
           </a:xfrm>
           <a:prstGeom prst="rect">
             <a:avLst/>
@@ -6036,6 +6241,22 @@
             <a:spAutoFit/>
           </a:bodyPr>
           <a:lstStyle/>
+          <a:p>
+            <a:pPr algn="l">
+              <a:spcAft>
+                <a:spcPts val="1000"/>
+              </a:spcAft>
+            </a:pPr>
+            <a:r>
+              <a:rPr sz="2400" b="1">
+                <a:solidFill>
+                  <a:srgbClr val="1E40AF"/>
+                </a:solidFill>
+                <a:latin typeface="Calibri"/>
+              </a:rPr>
+              <a:t>Chatbot AI trả lời:</a:t>
+            </a:r>
+          </a:p>
           <a:p>
             <a:pPr algn="l" marL="365760" indent="-365760">
               <a:spcAft>
@@ -6048,13 +6269,13 @@
               <a:buChar char="•"/>
             </a:pPr>
             <a:r>
-              <a:rPr sz="2600">
+              <a:rPr sz="2400">
                 <a:solidFill>
                   <a:srgbClr val="1E293B"/>
                 </a:solidFill>
                 <a:latin typeface="Calibri"/>
               </a:rPr>
-              <a:t>Quét mã QR bằng điện thoại</a:t>
+              <a:t>(4; 7] \ (−3; 5] = [5; 7]</a:t>
             </a:r>
           </a:p>
           <a:p>
@@ -6069,69 +6290,75 @@
               <a:buChar char="•"/>
             </a:pPr>
             <a:r>
-              <a:rPr sz="2600">
+              <a:rPr sz="2400">
                 <a:solidFill>
                   <a:srgbClr val="1E293B"/>
                 </a:solidFill>
                 <a:latin typeface="Calibri"/>
               </a:rPr>
-              <a:t>Nhập họ tên và lớp</a:t>
-            </a:r>
-          </a:p>
-          <a:p>
-            <a:pPr algn="l" marL="365760" indent="-365760">
-              <a:spcAft>
-                <a:spcPts val="1000"/>
-              </a:spcAft>
-              <a:buClr>
-                <a:srgbClr val="1E40AF"/>
-              </a:buClr>
-              <a:buFont typeface="Arial"/>
-              <a:buChar char="•"/>
-            </a:pPr>
-            <a:r>
-              <a:rPr sz="2600">
-                <a:solidFill>
-                  <a:srgbClr val="1E293B"/>
-                </a:solidFill>
-                <a:latin typeface="Calibri"/>
-              </a:rPr>
-              <a:t>7 câu – làm trong 7 phút</a:t>
-            </a:r>
-          </a:p>
-          <a:p>
-            <a:pPr algn="l" marL="365760" indent="-365760">
-              <a:spcAft>
-                <a:spcPts val="1000"/>
-              </a:spcAft>
-              <a:buClr>
-                <a:srgbClr val="1E40AF"/>
-              </a:buClr>
-              <a:buFont typeface="Arial"/>
-              <a:buChar char="•"/>
-            </a:pPr>
-            <a:r>
-              <a:rPr sz="2600">
-                <a:solidFill>
-                  <a:srgbClr val="1E293B"/>
-                </a:solidFill>
-                <a:latin typeface="Calibri"/>
-              </a:rPr>
-              <a:t>Nộp bài, xem lời giải</a:t>
-            </a:r>
-          </a:p>
-        </p:txBody>
-      </p:sp>
-      <p:sp>
-        <p:nvSpPr>
-          <p:cNvPr id="9" name="TextBox 8"/>
+              <a:t>“∀x ∈ ℝ, x² &gt; 1 ⇒ x &gt; 1” đúng (x = 2)</a:t>
+            </a:r>
+          </a:p>
+        </p:txBody>
+      </p:sp>
+      <p:sp>
+        <p:nvSpPr>
+          <p:cNvPr id="7" name="Rounded Rectangle 6"/>
+          <p:cNvSpPr/>
+          <p:nvPr/>
+        </p:nvSpPr>
+        <p:spPr>
+          <a:xfrm>
+            <a:off x="731520" y="3346704"/>
+            <a:ext cx="8686800" cy="1143000"/>
+          </a:xfrm>
+          <a:prstGeom prst="roundRect">
+            <a:avLst>
+              <a:gd name="adj" fmla="val 8000"/>
+            </a:avLst>
+          </a:prstGeom>
+          <a:solidFill>
+            <a:srgbClr val="FEF2F2"/>
+          </a:solidFill>
+          <a:ln w="19050">
+            <a:solidFill>
+              <a:srgbClr val="991B1B"/>
+            </a:solidFill>
+          </a:ln>
+          <a:effectLst/>
+        </p:spPr>
+        <p:style>
+          <a:lnRef idx="1">
+            <a:schemeClr val="accent1"/>
+          </a:lnRef>
+          <a:fillRef idx="3">
+            <a:schemeClr val="accent1"/>
+          </a:fillRef>
+          <a:effectRef idx="2">
+            <a:schemeClr val="accent1"/>
+          </a:effectRef>
+          <a:fontRef idx="minor">
+            <a:schemeClr val="lt1"/>
+          </a:fontRef>
+        </p:style>
+        <p:txBody>
+          <a:bodyPr rtlCol="0" anchor="ctr"/>
+          <a:lstStyle/>
+          <a:p>
+            <a:pPr algn="ctr"/>
+          </a:p>
+        </p:txBody>
+      </p:sp>
+      <p:sp>
+        <p:nvSpPr>
+          <p:cNvPr id="8" name="TextBox 7"/>
           <p:cNvSpPr txBox="1"/>
           <p:nvPr/>
         </p:nvSpPr>
         <p:spPr>
           <a:xfrm>
-            <a:off x="5760720" y="4754880"/>
-            <a:ext cx="6035040" cy="1188720"/>
+            <a:off x="914400" y="3346704"/>
+            <a:ext cx="8321040" cy="1143000"/>
           </a:xfrm>
           <a:prstGeom prst="rect">
             <a:avLst/>
@@ -6139,25 +6366,93 @@
           <a:noFill/>
         </p:spPr>
         <p:txBody>
-          <a:bodyPr wrap="square" anchor="t">
+          <a:bodyPr wrap="square" anchor="ctr">
             <a:spAutoFit/>
           </a:bodyPr>
           <a:lstStyle/>
           <a:p>
             <a:pPr algn="l">
               <a:spcAft>
-                <a:spcPts val="1000"/>
+                <a:spcPts val="400"/>
               </a:spcAft>
             </a:pPr>
             <a:r>
-              <a:rPr sz="1800" b="1">
-                <a:solidFill>
-                  <a:srgbClr val="1E40AF"/>
+              <a:rPr sz="2400" b="1">
+                <a:solidFill>
+                  <a:srgbClr val="991B1B"/>
                 </a:solidFill>
                 <a:latin typeface="Calibri"/>
-                <a:hlinkClick r:id="rId3"/>
-              </a:rPr>
-              <a:t>trangtu66.github.io/Taode_thi_online/cc_chuong1_t10.html</a:t>
+              </a:rPr>
+              <a:t>Đúng: (4; 7] \ (−3; 5] = (5; 7]</a:t>
+            </a:r>
+          </a:p>
+          <a:p>
+            <a:pPr algn="l">
+              <a:spcAft>
+                <a:spcPts val="400"/>
+              </a:spcAft>
+            </a:pPr>
+            <a:r>
+              <a:rPr sz="2400" b="1">
+                <a:solidFill>
+                  <a:srgbClr val="991B1B"/>
+                </a:solidFill>
+                <a:latin typeface="Calibri"/>
+              </a:rPr>
+              <a:t>Mệnh đề sai: phản ví dụ x = −2</a:t>
+            </a:r>
+          </a:p>
+        </p:txBody>
+      </p:sp>
+      <p:sp>
+        <p:nvSpPr>
+          <p:cNvPr id="9" name="Rounded Rectangle 8"/>
+          <p:cNvSpPr/>
+          <p:nvPr/>
+        </p:nvSpPr>
+        <p:spPr>
+          <a:xfrm>
+            <a:off x="10463479" y="457200"/>
+            <a:ext cx="1179576" cy="457200"/>
+          </a:xfrm>
+          <a:prstGeom prst="roundRect">
+            <a:avLst/>
+          </a:prstGeom>
+          <a:solidFill>
+            <a:srgbClr val="166534"/>
+          </a:solidFill>
+          <a:ln>
+            <a:noFill/>
+          </a:ln>
+          <a:effectLst/>
+        </p:spPr>
+        <p:style>
+          <a:lnRef idx="1">
+            <a:schemeClr val="accent1"/>
+          </a:lnRef>
+          <a:fillRef idx="3">
+            <a:schemeClr val="accent1"/>
+          </a:fillRef>
+          <a:effectRef idx="2">
+            <a:schemeClr val="accent1"/>
+          </a:effectRef>
+          <a:fontRef idx="minor">
+            <a:schemeClr val="lt1"/>
+          </a:fontRef>
+        </p:style>
+        <p:txBody>
+          <a:bodyPr rtlCol="0" anchor="ctr" tIns="0" bIns="0"/>
+          <a:lstStyle/>
+          <a:p>
+            <a:pPr algn="ctr"/>
+            <a:r>
+              <a:rPr sz="1400" b="1">
+                <a:solidFill>
+                  <a:srgbClr val="FFFFFF"/>
+                </a:solidFill>
+                <a:latin typeface="Arial"/>
+              </a:rPr>
+              <a:t>LỜI GIẢI</a:t>
             </a:r>
           </a:p>
         </p:txBody>
@@ -6241,7 +6536,7 @@
         <p:spPr>
           <a:xfrm>
             <a:off x="731520" y="274320"/>
-            <a:ext cx="10972800" cy="868680"/>
+            <a:ext cx="9848088" cy="868680"/>
           </a:xfrm>
           <a:prstGeom prst="rect">
             <a:avLst/>
@@ -6261,7 +6556,7 @@
                 </a:solidFill>
                 <a:latin typeface="Arial"/>
               </a:rPr>
-              <a:t>BÀI TẬP 1.27 – LỜI GIẢI</a:t>
+              <a:t>VẬN DỤNG: BÀI TẬP 1.27</a:t>
             </a:r>
           </a:p>
         </p:txBody>
@@ -6340,21 +6635,45 @@
                 </a:solidFill>
                 <a:latin typeface="Calibri"/>
               </a:rPr>
-              <a:t>Toán 10 · Bài tập cuối chương I          19</a:t>
-            </a:r>
-          </a:p>
-        </p:txBody>
-      </p:sp>
-      <p:sp>
-        <p:nvSpPr>
-          <p:cNvPr id="6" name="TextBox 5"/>
+              <a:t>Toán 10 · Bài tập cuối chương I          18</a:t>
+            </a:r>
+          </a:p>
+        </p:txBody>
+      </p:sp>
+      <p:pic>
+        <p:nvPicPr>
+          <p:cNvPr id="9" name="Picture 8" descr="rId9.png"/>
+          <p:cNvPicPr>
+            <a:picLocks noChangeAspect="1"/>
+          </p:cNvPicPr>
+          <p:nvPr/>
+        </p:nvPicPr>
+        <p:blipFill>
+          <a:blip r:embed="rId2"/>
+          <a:stretch>
+            <a:fillRect/>
+          </a:stretch>
+        </p:blipFill>
+        <p:spPr>
+          <a:xfrm>
+            <a:off x="7406640" y="2337511"/>
+            <a:ext cx="4389120" cy="2960217"/>
+          </a:xfrm>
+          <a:prstGeom prst="rect">
+            <a:avLst/>
+          </a:prstGeom>
+        </p:spPr>
+      </p:pic>
+      <p:sp>
+        <p:nvSpPr>
+          <p:cNvPr id="10" name="TextBox 9"/>
           <p:cNvSpPr txBox="1"/>
           <p:nvPr/>
         </p:nvSpPr>
         <p:spPr>
           <a:xfrm>
             <a:off x="731520" y="1508760"/>
-            <a:ext cx="6400800" cy="1700784"/>
+            <a:ext cx="6400800" cy="2267712"/>
           </a:xfrm>
           <a:prstGeom prst="rect">
             <a:avLst/>
@@ -6366,22 +6685,6 @@
             <a:spAutoFit/>
           </a:bodyPr>
           <a:lstStyle/>
-          <a:p>
-            <a:pPr algn="l">
-              <a:spcAft>
-                <a:spcPts val="1000"/>
-              </a:spcAft>
-            </a:pPr>
-            <a:r>
-              <a:rPr sz="2400" b="1">
-                <a:solidFill>
-                  <a:srgbClr val="1E40AF"/>
-                </a:solidFill>
-                <a:latin typeface="Calibri"/>
-              </a:rPr>
-              <a:t>A: thăm Thiên Cung;  B: thăm Titop</a:t>
-            </a:r>
-          </a:p>
           <a:p>
             <a:pPr algn="l" marL="365760" indent="-365760">
               <a:spcAft>
@@ -6400,7 +6703,7 @@
                 </a:solidFill>
                 <a:latin typeface="Calibri"/>
               </a:rPr>
-              <a:t>1 410 = 789 + 690 − n(A ∩ B)</a:t>
+              <a:t>1 410 khách, ai cũng thăm ≥ 1 nơi</a:t>
             </a:r>
           </a:p>
           <a:p>
@@ -6421,34 +6724,72 @@
                 </a:solidFill>
                 <a:latin typeface="Calibri"/>
               </a:rPr>
-              <a:t>Số liệu đúng: 69 khách đếm hai lần</a:t>
-            </a:r>
-          </a:p>
-        </p:txBody>
-      </p:sp>
-      <p:sp>
-        <p:nvSpPr>
-          <p:cNvPr id="7" name="Rounded Rectangle 6"/>
+              <a:t>789 khách thăm động Thiên Cung</a:t>
+            </a:r>
+          </a:p>
+          <a:p>
+            <a:pPr algn="l" marL="365760" indent="-365760">
+              <a:spcAft>
+                <a:spcPts val="1000"/>
+              </a:spcAft>
+              <a:buClr>
+                <a:srgbClr val="1E40AF"/>
+              </a:buClr>
+              <a:buFont typeface="Arial"/>
+              <a:buChar char="•"/>
+            </a:pPr>
+            <a:r>
+              <a:rPr sz="2400">
+                <a:solidFill>
+                  <a:srgbClr val="1E293B"/>
+                </a:solidFill>
+                <a:latin typeface="Calibri"/>
+              </a:rPr>
+              <a:t>690 khách thăm đảo Titop</a:t>
+            </a:r>
+          </a:p>
+          <a:p>
+            <a:pPr algn="l" marL="365760" indent="-365760">
+              <a:spcAft>
+                <a:spcPts val="1000"/>
+              </a:spcAft>
+              <a:buClr>
+                <a:srgbClr val="1E40AF"/>
+              </a:buClr>
+              <a:buFont typeface="Arial"/>
+              <a:buChar char="•"/>
+            </a:pPr>
+            <a:r>
+              <a:rPr sz="2400">
+                <a:solidFill>
+                  <a:srgbClr val="1E293B"/>
+                </a:solidFill>
+                <a:latin typeface="Calibri"/>
+              </a:rPr>
+              <a:t>Bao nhiêu khách thăm cả hai nơi?</a:t>
+            </a:r>
+          </a:p>
+        </p:txBody>
+      </p:sp>
+      <p:sp>
+        <p:nvSpPr>
+          <p:cNvPr id="11" name="Rounded Rectangle 10"/>
           <p:cNvSpPr/>
           <p:nvPr/>
         </p:nvSpPr>
         <p:spPr>
           <a:xfrm>
-            <a:off x="731520" y="3346704"/>
-            <a:ext cx="6400800" cy="685800"/>
+            <a:off x="10701223" y="457200"/>
+            <a:ext cx="941832" cy="457200"/>
           </a:xfrm>
           <a:prstGeom prst="roundRect">
-            <a:avLst>
-              <a:gd name="adj" fmla="val 8000"/>
-            </a:avLst>
+            <a:avLst/>
           </a:prstGeom>
           <a:solidFill>
-            <a:srgbClr val="FEF2F2"/>
+            <a:srgbClr val="1E40AF"/>
           </a:solidFill>
-          <a:ln w="19050">
-            <a:solidFill>
-              <a:srgbClr val="991B1B"/>
-            </a:solidFill>
+          <a:ln>
+            <a:noFill/>
           </a:ln>
           <a:effectLst/>
         </p:spPr>
@@ -6467,76 +6808,22 @@
           </a:fontRef>
         </p:style>
         <p:txBody>
-          <a:bodyPr rtlCol="0" anchor="ctr"/>
+          <a:bodyPr rtlCol="0" anchor="ctr" tIns="0" bIns="0"/>
           <a:lstStyle/>
           <a:p>
             <a:pPr algn="ctr"/>
-          </a:p>
-        </p:txBody>
-      </p:sp>
-      <p:sp>
-        <p:nvSpPr>
-          <p:cNvPr id="8" name="TextBox 7"/>
-          <p:cNvSpPr txBox="1"/>
-          <p:nvPr/>
-        </p:nvSpPr>
-        <p:spPr>
-          <a:xfrm>
-            <a:off x="914400" y="3346704"/>
-            <a:ext cx="6035040" cy="685800"/>
-          </a:xfrm>
-          <a:prstGeom prst="rect">
-            <a:avLst/>
-          </a:prstGeom>
-          <a:noFill/>
-        </p:spPr>
-        <p:txBody>
-          <a:bodyPr wrap="square" anchor="ctr">
-            <a:spAutoFit/>
-          </a:bodyPr>
-          <a:lstStyle/>
-          <a:p>
-            <a:pPr algn="l">
-              <a:spcAft>
-                <a:spcPts val="400"/>
-              </a:spcAft>
-            </a:pPr>
-            <a:r>
-              <a:rPr sz="2400" b="1">
-                <a:solidFill>
-                  <a:srgbClr val="991B1B"/>
-                </a:solidFill>
-                <a:latin typeface="Calibri"/>
-              </a:rPr>
-              <a:t>n(A ∩ B) = 69 khách</a:t>
-            </a:r>
-          </a:p>
-        </p:txBody>
-      </p:sp>
-      <p:pic>
-        <p:nvPicPr>
-          <p:cNvPr id="9" name="Picture 8" descr="rId9.png"/>
-          <p:cNvPicPr>
-            <a:picLocks noChangeAspect="1"/>
-          </p:cNvPicPr>
-          <p:nvPr/>
-        </p:nvPicPr>
-        <p:blipFill>
-          <a:blip r:embed="rId2"/>
-          <a:stretch>
-            <a:fillRect/>
-          </a:stretch>
-        </p:blipFill>
-        <p:spPr>
-          <a:xfrm>
-            <a:off x="7406640" y="2337511"/>
-            <a:ext cx="4389120" cy="2960217"/>
-          </a:xfrm>
-          <a:prstGeom prst="rect">
-            <a:avLst/>
-          </a:prstGeom>
-        </p:spPr>
-      </p:pic>
+            <a:r>
+              <a:rPr sz="1400" b="1">
+                <a:solidFill>
+                  <a:srgbClr val="FFFFFF"/>
+                </a:solidFill>
+                <a:latin typeface="Arial"/>
+              </a:rPr>
+              <a:t>ĐỀ BÀI</a:t>
+            </a:r>
+          </a:p>
+        </p:txBody>
+      </p:sp>
     </p:spTree>
   </p:cSld>
   <p:clrMapOvr>
@@ -6616,7 +6903,7 @@
         <p:spPr>
           <a:xfrm>
             <a:off x="731520" y="274320"/>
-            <a:ext cx="10972800" cy="868680"/>
+            <a:ext cx="9610344" cy="868680"/>
           </a:xfrm>
           <a:prstGeom prst="rect">
             <a:avLst/>
@@ -6636,7 +6923,7 @@
                 </a:solidFill>
                 <a:latin typeface="Arial"/>
               </a:rPr>
-              <a:t>TRẠM KIỂM CHỨNG AI – LỜI GIẢI</a:t>
+              <a:t>VẬN DỤNG: BÀI TẬP 1.27</a:t>
             </a:r>
           </a:p>
         </p:txBody>
@@ -6715,7 +7002,7 @@
                 </a:solidFill>
                 <a:latin typeface="Calibri"/>
               </a:rPr>
-              <a:t>Toán 10 · Bài tập cuối chương I          17</a:t>
+              <a:t>Toán 10 · Bài tập cuối chương I          19</a:t>
             </a:r>
           </a:p>
         </p:txBody>
@@ -6729,7 +7016,7 @@
         <p:spPr>
           <a:xfrm>
             <a:off x="731520" y="1508760"/>
-            <a:ext cx="10789920" cy="1700784"/>
+            <a:ext cx="6400800" cy="1700784"/>
           </a:xfrm>
           <a:prstGeom prst="rect">
             <a:avLst/>
@@ -6754,7 +7041,7 @@
                 </a:solidFill>
                 <a:latin typeface="Calibri"/>
               </a:rPr>
-              <a:t>Chatbot AI trả lời:</a:t>
+              <a:t>A: thăm Thiên Cung;  B: thăm Titop</a:t>
             </a:r>
           </a:p>
           <a:p>
@@ -6775,7 +7062,7 @@
                 </a:solidFill>
                 <a:latin typeface="Calibri"/>
               </a:rPr>
-              <a:t>(4; 7] \ (−3; 5] = [5; 7]</a:t>
+              <a:t>1 410 = 789 + 690 − n(A ∩ B)</a:t>
             </a:r>
           </a:p>
           <a:p>
@@ -6796,7 +7083,7 @@
                 </a:solidFill>
                 <a:latin typeface="Calibri"/>
               </a:rPr>
-              <a:t>“∀x ∈ ℝ, x² &gt; 1 ⇒ x &gt; 1” đúng (x = 2)</a:t>
+              <a:t>Số liệu đúng: 69 khách đếm hai lần</a:t>
             </a:r>
           </a:p>
         </p:txBody>
@@ -6810,7 +7097,7 @@
         <p:spPr>
           <a:xfrm>
             <a:off x="731520" y="3346704"/>
-            <a:ext cx="8686800" cy="1143000"/>
+            <a:ext cx="6400800" cy="685800"/>
           </a:xfrm>
           <a:prstGeom prst="roundRect">
             <a:avLst>
@@ -6858,7 +7145,7 @@
         <p:spPr>
           <a:xfrm>
             <a:off x="914400" y="3346704"/>
-            <a:ext cx="8321040" cy="1143000"/>
+            <a:ext cx="6035040" cy="685800"/>
           </a:xfrm>
           <a:prstGeom prst="rect">
             <a:avLst/>
@@ -6883,23 +7170,84 @@
                 </a:solidFill>
                 <a:latin typeface="Calibri"/>
               </a:rPr>
-              <a:t>Đúng: (4; 7] \ (−3; 5] = (5; 7]</a:t>
-            </a:r>
-          </a:p>
-          <a:p>
-            <a:pPr algn="l">
-              <a:spcAft>
-                <a:spcPts val="400"/>
-              </a:spcAft>
-            </a:pPr>
-            <a:r>
-              <a:rPr sz="2400" b="1">
-                <a:solidFill>
-                  <a:srgbClr val="991B1B"/>
-                </a:solidFill>
-                <a:latin typeface="Calibri"/>
-              </a:rPr>
-              <a:t>Mệnh đề sai: phản ví dụ x = −2</a:t>
+              <a:t>n(A ∩ B) = 69 khách</a:t>
+            </a:r>
+          </a:p>
+        </p:txBody>
+      </p:sp>
+      <p:pic>
+        <p:nvPicPr>
+          <p:cNvPr id="9" name="Picture 8" descr="rId9.png"/>
+          <p:cNvPicPr>
+            <a:picLocks noChangeAspect="1"/>
+          </p:cNvPicPr>
+          <p:nvPr/>
+        </p:nvPicPr>
+        <p:blipFill>
+          <a:blip r:embed="rId2"/>
+          <a:stretch>
+            <a:fillRect/>
+          </a:stretch>
+        </p:blipFill>
+        <p:spPr>
+          <a:xfrm>
+            <a:off x="7406640" y="2337511"/>
+            <a:ext cx="4389120" cy="2960217"/>
+          </a:xfrm>
+          <a:prstGeom prst="rect">
+            <a:avLst/>
+          </a:prstGeom>
+        </p:spPr>
+      </p:pic>
+      <p:sp>
+        <p:nvSpPr>
+          <p:cNvPr id="10" name="Rounded Rectangle 9"/>
+          <p:cNvSpPr/>
+          <p:nvPr/>
+        </p:nvSpPr>
+        <p:spPr>
+          <a:xfrm>
+            <a:off x="10463479" y="457200"/>
+            <a:ext cx="1179576" cy="457200"/>
+          </a:xfrm>
+          <a:prstGeom prst="roundRect">
+            <a:avLst/>
+          </a:prstGeom>
+          <a:solidFill>
+            <a:srgbClr val="166534"/>
+          </a:solidFill>
+          <a:ln>
+            <a:noFill/>
+          </a:ln>
+          <a:effectLst/>
+        </p:spPr>
+        <p:style>
+          <a:lnRef idx="1">
+            <a:schemeClr val="accent1"/>
+          </a:lnRef>
+          <a:fillRef idx="3">
+            <a:schemeClr val="accent1"/>
+          </a:fillRef>
+          <a:effectRef idx="2">
+            <a:schemeClr val="accent1"/>
+          </a:effectRef>
+          <a:fontRef idx="minor">
+            <a:schemeClr val="lt1"/>
+          </a:fontRef>
+        </p:style>
+        <p:txBody>
+          <a:bodyPr rtlCol="0" anchor="ctr" tIns="0" bIns="0"/>
+          <a:lstStyle/>
+          <a:p>
+            <a:pPr algn="ctr"/>
+            <a:r>
+              <a:rPr sz="1400" b="1">
+                <a:solidFill>
+                  <a:srgbClr val="FFFFFF"/>
+                </a:solidFill>
+                <a:latin typeface="Arial"/>
+              </a:rPr>
+              <a:t>LỜI GIẢI</a:t>
             </a:r>
           </a:p>
         </p:txBody>
@@ -7335,7 +7683,7 @@
                 </a:solidFill>
                 <a:latin typeface="Arial"/>
               </a:rPr>
-              <a:t>TỰ LUẬN 1.25 – 1.26 – LỜI GIẢI</a:t>
+              <a:t>NHIỆM VỤ VỀ NHÀ</a:t>
             </a:r>
           </a:p>
         </p:txBody>
@@ -7414,7 +7762,7 @@
                 </a:solidFill>
                 <a:latin typeface="Calibri"/>
               </a:rPr>
-              <a:t>Toán 10 · Bài tập cuối chương I          15</a:t>
+              <a:t>Toán 10 · Bài tập cuối chương I          20</a:t>
             </a:r>
           </a:p>
         </p:txBody>
@@ -7428,7 +7776,7 @@
         <p:spPr>
           <a:xfrm>
             <a:off x="731520" y="1508760"/>
-            <a:ext cx="10789920" cy="3118103"/>
+            <a:ext cx="10789920" cy="2834640"/>
           </a:xfrm>
           <a:prstGeom prst="rect">
             <a:avLst/>
@@ -7452,13 +7800,13 @@
               <a:buChar char="•"/>
             </a:pPr>
             <a:r>
-              <a:rPr sz="2200">
+              <a:rPr sz="2400">
                 <a:solidFill>
                   <a:srgbClr val="1E293B"/>
                 </a:solidFill>
                 <a:latin typeface="Calibri"/>
               </a:rPr>
-              <a:t>1.25. A = [−2; 3],  B = (1; +∞)</a:t>
+              <a:t>Chọn điểm du lịch ở Gia Lai</a:t>
             </a:r>
           </a:p>
           <a:p>
@@ -7473,13 +7821,13 @@
               <a:buChar char="•"/>
             </a:pPr>
             <a:r>
-              <a:rPr sz="2200">
+              <a:rPr sz="2400">
                 <a:solidFill>
                   <a:srgbClr val="1E293B"/>
                 </a:solidFill>
                 <a:latin typeface="Calibri"/>
               </a:rPr>
-              <a:t>A ∩ B = (1; 3];   B \ A = (3; +∞)</a:t>
+              <a:t>Viết đoạn giới thiệu, ghi nguồn</a:t>
             </a:r>
           </a:p>
           <a:p>
@@ -7494,31 +7842,13 @@
               <a:buChar char="•"/>
             </a:pPr>
             <a:r>
-              <a:rPr sz="2200">
+              <a:rPr sz="2400">
                 <a:solidFill>
                   <a:srgbClr val="1E293B"/>
                 </a:solidFill>
                 <a:latin typeface="Calibri"/>
               </a:rPr>
-              <a:t>C</a:t>
-            </a:r>
-            <a:r>
-              <a:rPr sz="2200" baseline="-25000">
-                <a:solidFill>
-                  <a:srgbClr val="1E293B"/>
-                </a:solidFill>
-                <a:latin typeface="Calibri"/>
-              </a:rPr>
-              <a:t>ℝ</a:t>
-            </a:r>
-            <a:r>
-              <a:rPr sz="2200">
-                <a:solidFill>
-                  <a:srgbClr val="1E293B"/>
-                </a:solidFill>
-                <a:latin typeface="Calibri"/>
-              </a:rPr>
-              <a:t>B = (−∞; 1]</a:t>
+              <a:t>Tự đặt bài toán như 1.27</a:t>
             </a:r>
           </a:p>
           <a:p>
@@ -7533,13 +7863,13 @@
               <a:buChar char="•"/>
             </a:pPr>
             <a:r>
-              <a:rPr sz="2200">
+              <a:rPr sz="2400">
                 <a:solidFill>
                   <a:srgbClr val="1E293B"/>
                 </a:solidFill>
                 <a:latin typeface="Calibri"/>
               </a:rPr>
-              <a:t>1.26. (−∞; 1) ∩ (0; +∞) = (0; 1)</a:t>
+              <a:t>Giải bằng biểu đồ Ven</a:t>
             </a:r>
           </a:p>
           <a:p>
@@ -7554,34 +7884,13 @@
               <a:buChar char="•"/>
             </a:pPr>
             <a:r>
-              <a:rPr sz="2200">
+              <a:rPr sz="2400">
                 <a:solidFill>
                   <a:srgbClr val="1E293B"/>
                 </a:solidFill>
                 <a:latin typeface="Calibri"/>
               </a:rPr>
-              <a:t>(4; 7] ∪ (−1; 5) = (−1; 7]</a:t>
-            </a:r>
-          </a:p>
-          <a:p>
-            <a:pPr algn="l" marL="365760" indent="-365760">
-              <a:spcAft>
-                <a:spcPts val="1000"/>
-              </a:spcAft>
-              <a:buClr>
-                <a:srgbClr val="1E40AF"/>
-              </a:buClr>
-              <a:buFont typeface="Arial"/>
-              <a:buChar char="•"/>
-            </a:pPr>
-            <a:r>
-              <a:rPr sz="2200">
-                <a:solidFill>
-                  <a:srgbClr val="1E293B"/>
-                </a:solidFill>
-                <a:latin typeface="Calibri"/>
-              </a:rPr>
-              <a:t>(4; 7] \ (−3; 5] = (5; 7]</a:t>
+              <a:t>Ghi Nhật ký sử dụng AI</a:t>
             </a:r>
           </a:p>
         </p:txBody>
@@ -7685,7 +7994,7 @@
                 </a:solidFill>
                 <a:latin typeface="Arial"/>
               </a:rPr>
-              <a:t>TỰ LUẬN 1.24 – LỜI GIẢI</a:t>
+              <a:t>BÀI TẬP CỦA BẠN</a:t>
             </a:r>
           </a:p>
         </p:txBody>
@@ -7764,21 +8073,91 @@
                 </a:solidFill>
                 <a:latin typeface="Calibri"/>
               </a:rPr>
-              <a:t>Toán 10 · Bài tập cuối chương I          13</a:t>
-            </a:r>
-          </a:p>
-        </p:txBody>
-      </p:sp>
-      <p:sp>
-        <p:nvSpPr>
-          <p:cNvPr id="6" name="TextBox 5"/>
+              <a:t>Toán 10 · Bài tập cuối chương I          21</a:t>
+            </a:r>
+          </a:p>
+        </p:txBody>
+      </p:sp>
+      <p:sp>
+        <p:nvSpPr>
+          <p:cNvPr id="6" name="Rectangle 5"/>
+          <p:cNvSpPr/>
+          <p:nvPr/>
+        </p:nvSpPr>
+        <p:spPr>
+          <a:xfrm>
+            <a:off x="731520" y="1463040"/>
+            <a:ext cx="4572000" cy="4572000"/>
+          </a:xfrm>
+          <a:prstGeom prst="rect">
+            <a:avLst/>
+          </a:prstGeom>
+          <a:solidFill>
+            <a:srgbClr val="F8FAFC"/>
+          </a:solidFill>
+          <a:ln w="19050">
+            <a:solidFill>
+              <a:srgbClr val="E2E8F0"/>
+            </a:solidFill>
+          </a:ln>
+          <a:effectLst/>
+        </p:spPr>
+        <p:style>
+          <a:lnRef idx="1">
+            <a:schemeClr val="accent1"/>
+          </a:lnRef>
+          <a:fillRef idx="3">
+            <a:schemeClr val="accent1"/>
+          </a:fillRef>
+          <a:effectRef idx="2">
+            <a:schemeClr val="accent1"/>
+          </a:effectRef>
+          <a:fontRef idx="minor">
+            <a:schemeClr val="lt1"/>
+          </a:fontRef>
+        </p:style>
+        <p:txBody>
+          <a:bodyPr rtlCol="0" anchor="ctr"/>
+          <a:lstStyle/>
+          <a:p>
+            <a:pPr algn="ctr"/>
+          </a:p>
+        </p:txBody>
+      </p:sp>
+      <p:pic>
+        <p:nvPicPr>
+          <p:cNvPr id="7" name="Picture 6" descr="QR_CungCo_Chuong1_Toan10.png"/>
+          <p:cNvPicPr>
+            <a:picLocks noChangeAspect="1"/>
+          </p:cNvPicPr>
+          <p:nvPr/>
+        </p:nvPicPr>
+        <p:blipFill>
+          <a:blip r:embed="rId2"/>
+          <a:stretch>
+            <a:fillRect/>
+          </a:stretch>
+        </p:blipFill>
+        <p:spPr>
+          <a:xfrm>
+            <a:off x="960120" y="1691640"/>
+            <a:ext cx="4114800" cy="4114800"/>
+          </a:xfrm>
+          <a:prstGeom prst="rect">
+            <a:avLst/>
+          </a:prstGeom>
+        </p:spPr>
+      </p:pic>
+      <p:sp>
+        <p:nvSpPr>
+          <p:cNvPr id="8" name="TextBox 7"/>
           <p:cNvSpPr txBox="1"/>
           <p:nvPr/>
         </p:nvSpPr>
         <p:spPr>
           <a:xfrm>
-            <a:off x="731520" y="1508760"/>
-            <a:ext cx="10789920" cy="2267712"/>
+            <a:off x="5760720" y="1554480"/>
+            <a:ext cx="6035040" cy="3108960"/>
           </a:xfrm>
           <a:prstGeom prst="rect">
             <a:avLst/>
@@ -7790,22 +8169,6 @@
             <a:spAutoFit/>
           </a:bodyPr>
           <a:lstStyle/>
-          <a:p>
-            <a:pPr algn="l">
-              <a:spcAft>
-                <a:spcPts val="1000"/>
-              </a:spcAft>
-            </a:pPr>
-            <a:r>
-              <a:rPr sz="2400" b="1">
-                <a:solidFill>
-                  <a:srgbClr val="1E40AF"/>
-                </a:solidFill>
-                <a:latin typeface="Calibri"/>
-              </a:rPr>
-              <a:t>A = {x ∈ ℕ | x &lt; 7};  B = {1; 2; 3; 6; 7; 8}</a:t>
-            </a:r>
-          </a:p>
           <a:p>
             <a:pPr algn="l" marL="365760" indent="-365760">
               <a:spcAft>
@@ -7818,13 +8181,13 @@
               <a:buChar char="•"/>
             </a:pPr>
             <a:r>
-              <a:rPr sz="2400">
+              <a:rPr sz="2600">
                 <a:solidFill>
                   <a:srgbClr val="1E293B"/>
                 </a:solidFill>
                 <a:latin typeface="Calibri"/>
               </a:rPr>
-              <a:t>A ∪ B = {0; 1; 2; 3; 4; 5; 6; 7; 8}</a:t>
+              <a:t>Quét mã QR bằng điện thoại</a:t>
             </a:r>
           </a:p>
           <a:p>
@@ -7839,13 +8202,13 @@
               <a:buChar char="•"/>
             </a:pPr>
             <a:r>
-              <a:rPr sz="2400">
+              <a:rPr sz="2600">
                 <a:solidFill>
                   <a:srgbClr val="1E293B"/>
                 </a:solidFill>
                 <a:latin typeface="Calibri"/>
               </a:rPr>
-              <a:t>A ∩ B = {1; 2; 3; 6}</a:t>
+              <a:t>Nhập họ tên và lớp</a:t>
             </a:r>
           </a:p>
           <a:p>
@@ -7860,13 +8223,74 @@
               <a:buChar char="•"/>
             </a:pPr>
             <a:r>
-              <a:rPr sz="2400">
+              <a:rPr sz="2600">
                 <a:solidFill>
                   <a:srgbClr val="1E293B"/>
                 </a:solidFill>
                 <a:latin typeface="Calibri"/>
               </a:rPr>
-              <a:t>A \ B = {0; 4; 5}</a:t>
+              <a:t>7 câu – làm trong 7 phút</a:t>
+            </a:r>
+          </a:p>
+          <a:p>
+            <a:pPr algn="l" marL="365760" indent="-365760">
+              <a:spcAft>
+                <a:spcPts val="1000"/>
+              </a:spcAft>
+              <a:buClr>
+                <a:srgbClr val="1E40AF"/>
+              </a:buClr>
+              <a:buFont typeface="Arial"/>
+              <a:buChar char="•"/>
+            </a:pPr>
+            <a:r>
+              <a:rPr sz="2600">
+                <a:solidFill>
+                  <a:srgbClr val="1E293B"/>
+                </a:solidFill>
+                <a:latin typeface="Calibri"/>
+              </a:rPr>
+              <a:t>Nộp bài, xem lời giải</a:t>
+            </a:r>
+          </a:p>
+        </p:txBody>
+      </p:sp>
+      <p:sp>
+        <p:nvSpPr>
+          <p:cNvPr id="9" name="TextBox 8"/>
+          <p:cNvSpPr txBox="1"/>
+          <p:nvPr/>
+        </p:nvSpPr>
+        <p:spPr>
+          <a:xfrm>
+            <a:off x="5760720" y="4754880"/>
+            <a:ext cx="6035040" cy="1188720"/>
+          </a:xfrm>
+          <a:prstGeom prst="rect">
+            <a:avLst/>
+          </a:prstGeom>
+          <a:noFill/>
+        </p:spPr>
+        <p:txBody>
+          <a:bodyPr wrap="square" anchor="t">
+            <a:spAutoFit/>
+          </a:bodyPr>
+          <a:lstStyle/>
+          <a:p>
+            <a:pPr algn="l">
+              <a:spcAft>
+                <a:spcPts val="1000"/>
+              </a:spcAft>
+            </a:pPr>
+            <a:r>
+              <a:rPr sz="1800" b="1">
+                <a:solidFill>
+                  <a:srgbClr val="1E40AF"/>
+                </a:solidFill>
+                <a:latin typeface="Calibri"/>
+                <a:hlinkClick r:id="rId3"/>
+              </a:rPr>
+              <a:t>trangtu66.github.io/Taode_thi_online/cc_chuong1_t10.html</a:t>
             </a:r>
           </a:p>
         </p:txBody>
